--- a/v2/tests/unit/export/golden/report-ar.pptx
+++ b/v2/tests/unit/export/golden/report-ar.pptx
@@ -1471,7 +1471,7 @@
           <a:ln/>
         </p:spPr>
         <p:txBody>
-          <a:bodyPr wrap="square" lIns="0" tIns="0" rIns="0" bIns="0" rtlCol="0" anchor="t"/>
+          <a:bodyPr wrap="square" lIns="0" tIns="0" rIns="0" bIns="0" rtlCol="1" anchor="t"/>
           <a:lstStyle/>
           <a:p>
             <a:pPr rtl="1" algn="r" indent="0" marL="0">
@@ -1510,7 +1510,7 @@
           <a:ln/>
         </p:spPr>
         <p:txBody>
-          <a:bodyPr wrap="square" lIns="0" tIns="0" rIns="0" bIns="0" rtlCol="0" anchor="t"/>
+          <a:bodyPr wrap="square" lIns="0" tIns="0" rIns="0" bIns="0" rtlCol="1" anchor="t"/>
           <a:lstStyle/>
           <a:p>
             <a:pPr rtl="1" algn="r" indent="0" marL="0">
@@ -1549,7 +1549,7 @@
           <a:ln/>
         </p:spPr>
         <p:txBody>
-          <a:bodyPr wrap="square" lIns="0" tIns="0" rIns="0" bIns="0" rtlCol="0" anchor="t"/>
+          <a:bodyPr wrap="square" lIns="0" tIns="0" rIns="0" bIns="0" rtlCol="1" anchor="t"/>
           <a:lstStyle/>
           <a:p>
             <a:pPr rtl="1" algn="r" indent="0" marL="0">
@@ -1588,7 +1588,7 @@
           <a:ln/>
         </p:spPr>
         <p:txBody>
-          <a:bodyPr wrap="square" lIns="0" tIns="0" rIns="0" bIns="0" rtlCol="0" anchor="t"/>
+          <a:bodyPr wrap="square" lIns="0" tIns="0" rIns="0" bIns="0" rtlCol="1" anchor="t"/>
           <a:lstStyle/>
           <a:p>
             <a:pPr rtl="1" algn="r" indent="0" marL="0">
@@ -1627,7 +1627,7 @@
           <a:ln/>
         </p:spPr>
         <p:txBody>
-          <a:bodyPr wrap="square" lIns="0" tIns="0" rIns="0" bIns="0" rtlCol="0" anchor="t"/>
+          <a:bodyPr wrap="square" lIns="0" tIns="0" rIns="0" bIns="0" rtlCol="1" anchor="t"/>
           <a:lstStyle/>
           <a:p>
             <a:pPr rtl="1" algn="l" indent="0" marL="0">
@@ -1698,7 +1698,7 @@
           <a:ln/>
         </p:spPr>
         <p:txBody>
-          <a:bodyPr wrap="square" lIns="0" tIns="0" rIns="0" bIns="0" rtlCol="0" anchor="t"/>
+          <a:bodyPr wrap="square" lIns="0" tIns="0" rIns="0" bIns="0" rtlCol="1" anchor="t"/>
           <a:lstStyle/>
           <a:p>
             <a:pPr rtl="1" algn="r" indent="0" marL="0">
@@ -1757,7 +1757,7 @@
           <a:ln/>
         </p:spPr>
         <p:txBody>
-          <a:bodyPr wrap="square" lIns="0" tIns="0" rIns="0" bIns="0" rtlCol="0" anchor="t"/>
+          <a:bodyPr wrap="square" lIns="0" tIns="0" rIns="0" bIns="0" rtlCol="1" anchor="t"/>
           <a:lstStyle/>
           <a:p>
             <a:pPr rtl="1" algn="l" indent="0" marL="0">
@@ -1819,7 +1819,7 @@
           <a:ln/>
         </p:spPr>
         <p:txBody>
-          <a:bodyPr wrap="square" lIns="0" tIns="0" rIns="0" bIns="0" rtlCol="0" anchor="t"/>
+          <a:bodyPr wrap="square" lIns="0" tIns="0" rIns="0" bIns="0" rtlCol="1" anchor="t"/>
           <a:lstStyle/>
           <a:p>
             <a:pPr rtl="1" algn="r" indent="0" marL="0">
@@ -1858,7 +1858,7 @@
           <a:ln/>
         </p:spPr>
         <p:txBody>
-          <a:bodyPr wrap="square" lIns="0" tIns="0" rIns="0" bIns="0" rtlCol="0" anchor="t"/>
+          <a:bodyPr wrap="square" lIns="0" tIns="0" rIns="0" bIns="0" rtlCol="1" anchor="t"/>
           <a:lstStyle/>
           <a:p>
             <a:pPr rtl="1" algn="l" indent="0" marL="0">
@@ -1897,7 +1897,7 @@
           <a:ln/>
         </p:spPr>
         <p:txBody>
-          <a:bodyPr wrap="square" lIns="0" tIns="0" rIns="0" bIns="0" rtlCol="0" anchor="t"/>
+          <a:bodyPr wrap="square" lIns="0" tIns="0" rIns="0" bIns="0" rtlCol="1" anchor="t"/>
           <a:lstStyle/>
           <a:p>
             <a:pPr rtl="1" algn="r" indent="0" marL="0">
@@ -1963,7 +1963,7 @@
           <a:ln/>
         </p:spPr>
         <p:txBody>
-          <a:bodyPr wrap="square" lIns="0" tIns="0" rIns="0" bIns="0" rtlCol="0" anchor="t"/>
+          <a:bodyPr wrap="square" lIns="0" tIns="0" rIns="0" bIns="0" rtlCol="1" anchor="t"/>
           <a:lstStyle/>
           <a:p>
             <a:pPr rtl="1" algn="r" indent="0" marL="0">
@@ -2002,7 +2002,7 @@
           <a:ln/>
         </p:spPr>
         <p:txBody>
-          <a:bodyPr wrap="square" lIns="0" tIns="0" rIns="0" bIns="0" rtlCol="0" anchor="t"/>
+          <a:bodyPr wrap="square" lIns="0" tIns="0" rIns="0" bIns="0" rtlCol="1" anchor="t"/>
           <a:lstStyle/>
           <a:p>
             <a:pPr rtl="1" algn="r" indent="0" marL="0">
@@ -2019,9 +2019,6 @@
               </a:rPr>
               <a:t>606,500</a:t>
             </a:r>
-            <a:pPr algn="r" indent="0" marL="0">
-              <a:buNone/>
-            </a:pPr>
             <a:r>
               <a:rPr lang="ar-SA" altLang="en-US" sz="1000" dirty="0">
                 <a:solidFill>
@@ -2055,7 +2052,7 @@
           <a:ln/>
         </p:spPr>
         <p:txBody>
-          <a:bodyPr wrap="square" lIns="0" tIns="0" rIns="0" bIns="0" rtlCol="0" anchor="t"/>
+          <a:bodyPr wrap="square" lIns="0" tIns="0" rIns="0" bIns="0" rtlCol="1" anchor="t"/>
           <a:lstStyle/>
           <a:p>
             <a:pPr rtl="1" algn="r" indent="0" marL="0">
@@ -2098,10 +2095,10 @@
           <a:ln/>
         </p:spPr>
         <p:txBody>
-          <a:bodyPr wrap="square" lIns="0" tIns="0" rIns="0" bIns="0" rtlCol="0" anchor="ctr"/>
+          <a:bodyPr wrap="square" lIns="0" tIns="0" rIns="0" bIns="0" rtlCol="1" anchor="ctr"/>
           <a:lstStyle/>
           <a:p>
-            <a:pPr algn="ctr" indent="0" marL="0">
+            <a:pPr rtl="1" algn="ctr" indent="0" marL="0">
               <a:buNone/>
             </a:pPr>
             <a:r>
@@ -2113,7 +2110,7 @@
                 <a:ea typeface="IBM Plex Sans Arabic" pitchFamily="34" charset="-122"/>
                 <a:cs typeface="IBM Plex Sans Arabic" pitchFamily="34" charset="-120"/>
               </a:rPr>
-              <a:t>+18.5%</a:t>
+              <a:t>‎+18.5%</a:t>
             </a:r>
             <a:endParaRPr lang="en-GB" sz="900" dirty="0"/>
           </a:p>
@@ -2164,7 +2161,7 @@
           <a:ln/>
         </p:spPr>
         <p:txBody>
-          <a:bodyPr wrap="square" lIns="0" tIns="0" rIns="0" bIns="0" rtlCol="0" anchor="t"/>
+          <a:bodyPr wrap="square" lIns="0" tIns="0" rIns="0" bIns="0" rtlCol="1" anchor="t"/>
           <a:lstStyle/>
           <a:p>
             <a:pPr rtl="1" algn="r" indent="0" marL="0">
@@ -2203,7 +2200,7 @@
           <a:ln/>
         </p:spPr>
         <p:txBody>
-          <a:bodyPr wrap="square" lIns="0" tIns="0" rIns="0" bIns="0" rtlCol="0" anchor="t"/>
+          <a:bodyPr wrap="square" lIns="0" tIns="0" rIns="0" bIns="0" rtlCol="1" anchor="t"/>
           <a:lstStyle/>
           <a:p>
             <a:pPr rtl="1" algn="r" indent="0" marL="0">
@@ -2242,7 +2239,7 @@
           <a:ln/>
         </p:spPr>
         <p:txBody>
-          <a:bodyPr wrap="square" lIns="0" tIns="0" rIns="0" bIns="0" rtlCol="0" anchor="t"/>
+          <a:bodyPr wrap="square" lIns="0" tIns="0" rIns="0" bIns="0" rtlCol="1" anchor="t"/>
           <a:lstStyle/>
           <a:p>
             <a:pPr rtl="1" algn="r" indent="0" marL="0">
@@ -2285,10 +2282,10 @@
           <a:ln/>
         </p:spPr>
         <p:txBody>
-          <a:bodyPr wrap="square" lIns="0" tIns="0" rIns="0" bIns="0" rtlCol="0" anchor="ctr"/>
+          <a:bodyPr wrap="square" lIns="0" tIns="0" rIns="0" bIns="0" rtlCol="1" anchor="ctr"/>
           <a:lstStyle/>
           <a:p>
-            <a:pPr algn="ctr" indent="0" marL="0">
+            <a:pPr rtl="1" algn="ctr" indent="0" marL="0">
               <a:buNone/>
             </a:pPr>
             <a:r>
@@ -2300,7 +2297,7 @@
                 <a:ea typeface="IBM Plex Sans Arabic" pitchFamily="34" charset="-122"/>
                 <a:cs typeface="IBM Plex Sans Arabic" pitchFamily="34" charset="-120"/>
               </a:rPr>
-              <a:t>+100%</a:t>
+              <a:t>‎+100%</a:t>
             </a:r>
             <a:endParaRPr lang="en-GB" sz="900" dirty="0"/>
           </a:p>
@@ -2351,7 +2348,7 @@
           <a:ln/>
         </p:spPr>
         <p:txBody>
-          <a:bodyPr wrap="square" lIns="0" tIns="0" rIns="0" bIns="0" rtlCol="0" anchor="t"/>
+          <a:bodyPr wrap="square" lIns="0" tIns="0" rIns="0" bIns="0" rtlCol="1" anchor="t"/>
           <a:lstStyle/>
           <a:p>
             <a:pPr rtl="1" algn="r" indent="0" marL="0">
@@ -2390,7 +2387,7 @@
           <a:ln/>
         </p:spPr>
         <p:txBody>
-          <a:bodyPr wrap="square" lIns="0" tIns="0" rIns="0" bIns="0" rtlCol="0" anchor="t"/>
+          <a:bodyPr wrap="square" lIns="0" tIns="0" rIns="0" bIns="0" rtlCol="1" anchor="t"/>
           <a:lstStyle/>
           <a:p>
             <a:pPr rtl="1" algn="r" indent="0" marL="0">
@@ -2429,7 +2426,7 @@
           <a:ln/>
         </p:spPr>
         <p:txBody>
-          <a:bodyPr wrap="square" lIns="0" tIns="0" rIns="0" bIns="0" rtlCol="0" anchor="t"/>
+          <a:bodyPr wrap="square" lIns="0" tIns="0" rIns="0" bIns="0" rtlCol="1" anchor="t"/>
           <a:lstStyle/>
           <a:p>
             <a:pPr rtl="1" algn="r" indent="0" marL="0">
@@ -2472,10 +2469,10 @@
           <a:ln/>
         </p:spPr>
         <p:txBody>
-          <a:bodyPr wrap="square" lIns="0" tIns="0" rIns="0" bIns="0" rtlCol="0" anchor="ctr"/>
+          <a:bodyPr wrap="square" lIns="0" tIns="0" rIns="0" bIns="0" rtlCol="1" anchor="ctr"/>
           <a:lstStyle/>
           <a:p>
-            <a:pPr algn="ctr" indent="0" marL="0">
+            <a:pPr rtl="1" algn="ctr" indent="0" marL="0">
               <a:buNone/>
             </a:pPr>
             <a:r>
@@ -2487,7 +2484,7 @@
                 <a:ea typeface="IBM Plex Sans Arabic" pitchFamily="34" charset="-122"/>
                 <a:cs typeface="IBM Plex Sans Arabic" pitchFamily="34" charset="-120"/>
               </a:rPr>
-              <a:t>+200%</a:t>
+              <a:t>‎+200%</a:t>
             </a:r>
             <a:endParaRPr lang="en-GB" sz="900" dirty="0"/>
           </a:p>
@@ -2538,7 +2535,7 @@
           <a:ln/>
         </p:spPr>
         <p:txBody>
-          <a:bodyPr wrap="square" lIns="0" tIns="0" rIns="0" bIns="0" rtlCol="0" anchor="t"/>
+          <a:bodyPr wrap="square" lIns="0" tIns="0" rIns="0" bIns="0" rtlCol="1" anchor="t"/>
           <a:lstStyle/>
           <a:p>
             <a:pPr rtl="1" algn="r" indent="0" marL="0">
@@ -2577,7 +2574,7 @@
           <a:ln/>
         </p:spPr>
         <p:txBody>
-          <a:bodyPr wrap="square" lIns="0" tIns="0" rIns="0" bIns="0" rtlCol="0" anchor="t"/>
+          <a:bodyPr wrap="square" lIns="0" tIns="0" rIns="0" bIns="0" rtlCol="1" anchor="t"/>
           <a:lstStyle/>
           <a:p>
             <a:pPr rtl="1" algn="r" indent="0" marL="0">
@@ -2616,7 +2613,7 @@
           <a:ln/>
         </p:spPr>
         <p:txBody>
-          <a:bodyPr wrap="square" lIns="0" tIns="0" rIns="0" bIns="0" rtlCol="0" anchor="t"/>
+          <a:bodyPr wrap="square" lIns="0" tIns="0" rIns="0" bIns="0" rtlCol="1" anchor="t"/>
           <a:lstStyle/>
           <a:p>
             <a:pPr rtl="1" algn="r" indent="0" marL="0">
@@ -2659,10 +2656,10 @@
           <a:ln/>
         </p:spPr>
         <p:txBody>
-          <a:bodyPr wrap="square" lIns="0" tIns="0" rIns="0" bIns="0" rtlCol="0" anchor="ctr"/>
+          <a:bodyPr wrap="square" lIns="0" tIns="0" rIns="0" bIns="0" rtlCol="1" anchor="ctr"/>
           <a:lstStyle/>
           <a:p>
-            <a:pPr algn="ctr" indent="0" marL="0">
+            <a:pPr rtl="1" algn="ctr" indent="0" marL="0">
               <a:buNone/>
             </a:pPr>
             <a:r>
@@ -2674,7 +2671,7 @@
                 <a:ea typeface="IBM Plex Sans Arabic" pitchFamily="34" charset="-122"/>
                 <a:cs typeface="IBM Plex Sans Arabic" pitchFamily="34" charset="-120"/>
               </a:rPr>
-              <a:t>+57.9%</a:t>
+              <a:t>‎+57.9%</a:t>
             </a:r>
             <a:endParaRPr lang="en-GB" sz="900" dirty="0"/>
           </a:p>
@@ -2725,7 +2722,7 @@
           <a:ln/>
         </p:spPr>
         <p:txBody>
-          <a:bodyPr wrap="square" lIns="0" tIns="0" rIns="0" bIns="0" rtlCol="0" anchor="t"/>
+          <a:bodyPr wrap="square" lIns="0" tIns="0" rIns="0" bIns="0" rtlCol="1" anchor="t"/>
           <a:lstStyle/>
           <a:p>
             <a:pPr rtl="1" algn="r" indent="0" marL="0">
@@ -2764,7 +2761,7 @@
           <a:ln/>
         </p:spPr>
         <p:txBody>
-          <a:bodyPr wrap="square" lIns="0" tIns="0" rIns="0" bIns="0" rtlCol="0" anchor="t"/>
+          <a:bodyPr wrap="square" lIns="0" tIns="0" rIns="0" bIns="0" rtlCol="1" anchor="t"/>
           <a:lstStyle/>
           <a:p>
             <a:pPr rtl="1" algn="r" indent="0" marL="0">
@@ -2803,7 +2800,7 @@
           <a:ln/>
         </p:spPr>
         <p:txBody>
-          <a:bodyPr wrap="square" lIns="0" tIns="0" rIns="0" bIns="0" rtlCol="0" anchor="t"/>
+          <a:bodyPr wrap="square" lIns="0" tIns="0" rIns="0" bIns="0" rtlCol="1" anchor="t"/>
           <a:lstStyle/>
           <a:p>
             <a:pPr rtl="1" algn="r" indent="0" marL="0">
@@ -2846,10 +2843,10 @@
           <a:ln/>
         </p:spPr>
         <p:txBody>
-          <a:bodyPr wrap="square" lIns="0" tIns="0" rIns="0" bIns="0" rtlCol="0" anchor="ctr"/>
+          <a:bodyPr wrap="square" lIns="0" tIns="0" rIns="0" bIns="0" rtlCol="1" anchor="ctr"/>
           <a:lstStyle/>
           <a:p>
-            <a:pPr algn="ctr" indent="0" marL="0">
+            <a:pPr rtl="1" algn="ctr" indent="0" marL="0">
               <a:buNone/>
             </a:pPr>
             <a:r>
@@ -2861,7 +2858,7 @@
                 <a:ea typeface="IBM Plex Sans Arabic" pitchFamily="34" charset="-122"/>
                 <a:cs typeface="IBM Plex Sans Arabic" pitchFamily="34" charset="-120"/>
               </a:rPr>
-              <a:t>+3.8%</a:t>
+              <a:t>‎+3.8%</a:t>
             </a:r>
             <a:endParaRPr lang="en-GB" sz="900" dirty="0"/>
           </a:p>
@@ -2912,7 +2909,7 @@
           <a:ln/>
         </p:spPr>
         <p:txBody>
-          <a:bodyPr wrap="square" lIns="0" tIns="0" rIns="0" bIns="0" rtlCol="0" anchor="t"/>
+          <a:bodyPr wrap="square" lIns="0" tIns="0" rIns="0" bIns="0" rtlCol="1" anchor="t"/>
           <a:lstStyle/>
           <a:p>
             <a:pPr rtl="1" algn="r" indent="0" marL="0">
@@ -2951,7 +2948,7 @@
           <a:ln/>
         </p:spPr>
         <p:txBody>
-          <a:bodyPr wrap="square" lIns="0" tIns="0" rIns="0" bIns="0" rtlCol="0" anchor="t"/>
+          <a:bodyPr wrap="square" lIns="0" tIns="0" rIns="0" bIns="0" rtlCol="1" anchor="t"/>
           <a:lstStyle/>
           <a:p>
             <a:pPr rtl="1" algn="r" indent="0" marL="0">
@@ -2990,7 +2987,7 @@
           <a:ln/>
         </p:spPr>
         <p:txBody>
-          <a:bodyPr wrap="square" lIns="0" tIns="0" rIns="0" bIns="0" rtlCol="0" anchor="t"/>
+          <a:bodyPr wrap="square" lIns="0" tIns="0" rIns="0" bIns="0" rtlCol="1" anchor="t"/>
           <a:lstStyle/>
           <a:p>
             <a:pPr rtl="1" algn="r" indent="0" marL="0">
@@ -3033,10 +3030,10 @@
           <a:ln/>
         </p:spPr>
         <p:txBody>
-          <a:bodyPr wrap="square" lIns="0" tIns="0" rIns="0" bIns="0" rtlCol="0" anchor="ctr"/>
+          <a:bodyPr wrap="square" lIns="0" tIns="0" rIns="0" bIns="0" rtlCol="1" anchor="ctr"/>
           <a:lstStyle/>
           <a:p>
-            <a:pPr algn="ctr" indent="0" marL="0">
+            <a:pPr rtl="1" algn="ctr" indent="0" marL="0">
               <a:buNone/>
             </a:pPr>
             <a:r>
@@ -3048,7 +3045,7 @@
                 <a:ea typeface="IBM Plex Sans Arabic" pitchFamily="34" charset="-122"/>
                 <a:cs typeface="IBM Plex Sans Arabic" pitchFamily="34" charset="-120"/>
               </a:rPr>
-              <a:t>+50%</a:t>
+              <a:t>‎+50%</a:t>
             </a:r>
             <a:endParaRPr lang="en-GB" sz="900" dirty="0"/>
           </a:p>
@@ -3099,7 +3096,7 @@
           <a:ln/>
         </p:spPr>
         <p:txBody>
-          <a:bodyPr wrap="square" lIns="0" tIns="0" rIns="0" bIns="0" rtlCol="0" anchor="t"/>
+          <a:bodyPr wrap="square" lIns="0" tIns="0" rIns="0" bIns="0" rtlCol="1" anchor="t"/>
           <a:lstStyle/>
           <a:p>
             <a:pPr rtl="1" algn="r" indent="0" marL="0">
@@ -3138,7 +3135,7 @@
           <a:ln/>
         </p:spPr>
         <p:txBody>
-          <a:bodyPr wrap="square" lIns="0" tIns="0" rIns="0" bIns="0" rtlCol="0" anchor="t"/>
+          <a:bodyPr wrap="square" lIns="0" tIns="0" rIns="0" bIns="0" rtlCol="1" anchor="t"/>
           <a:lstStyle/>
           <a:p>
             <a:pPr rtl="1" algn="r" indent="0" marL="0">
@@ -3177,7 +3174,7 @@
           <a:ln/>
         </p:spPr>
         <p:txBody>
-          <a:bodyPr wrap="square" lIns="0" tIns="0" rIns="0" bIns="0" rtlCol="0" anchor="t"/>
+          <a:bodyPr wrap="square" lIns="0" tIns="0" rIns="0" bIns="0" rtlCol="1" anchor="t"/>
           <a:lstStyle/>
           <a:p>
             <a:pPr rtl="1" algn="r" indent="0" marL="0">
@@ -3220,10 +3217,10 @@
           <a:ln/>
         </p:spPr>
         <p:txBody>
-          <a:bodyPr wrap="square" lIns="0" tIns="0" rIns="0" bIns="0" rtlCol="0" anchor="ctr"/>
+          <a:bodyPr wrap="square" lIns="0" tIns="0" rIns="0" bIns="0" rtlCol="1" anchor="ctr"/>
           <a:lstStyle/>
           <a:p>
-            <a:pPr algn="ctr" indent="0" marL="0">
+            <a:pPr rtl="1" algn="ctr" indent="0" marL="0">
               <a:buNone/>
             </a:pPr>
             <a:r>
@@ -3235,7 +3232,7 @@
                 <a:ea typeface="IBM Plex Sans Arabic" pitchFamily="34" charset="-122"/>
                 <a:cs typeface="IBM Plex Sans Arabic" pitchFamily="34" charset="-120"/>
               </a:rPr>
-              <a:t>+200%</a:t>
+              <a:t>‎+200%</a:t>
             </a:r>
             <a:endParaRPr lang="en-GB" sz="900" dirty="0"/>
           </a:p>
@@ -3286,7 +3283,7 @@
           <a:ln/>
         </p:spPr>
         <p:txBody>
-          <a:bodyPr wrap="square" lIns="0" tIns="0" rIns="0" bIns="0" rtlCol="0" anchor="t"/>
+          <a:bodyPr wrap="square" lIns="0" tIns="0" rIns="0" bIns="0" rtlCol="1" anchor="t"/>
           <a:lstStyle/>
           <a:p>
             <a:pPr rtl="1" algn="r" indent="0" marL="0">
@@ -3325,7 +3322,7 @@
           <a:ln/>
         </p:spPr>
         <p:txBody>
-          <a:bodyPr wrap="square" lIns="0" tIns="0" rIns="0" bIns="0" rtlCol="0" anchor="t"/>
+          <a:bodyPr wrap="square" lIns="0" tIns="0" rIns="0" bIns="0" rtlCol="1" anchor="t"/>
           <a:lstStyle/>
           <a:p>
             <a:pPr rtl="1" algn="r" indent="0" marL="0">
@@ -3364,7 +3361,7 @@
           <a:ln/>
         </p:spPr>
         <p:txBody>
-          <a:bodyPr wrap="square" lIns="0" tIns="0" rIns="0" bIns="0" rtlCol="0" anchor="t"/>
+          <a:bodyPr wrap="square" lIns="0" tIns="0" rIns="0" bIns="0" rtlCol="1" anchor="t"/>
           <a:lstStyle/>
           <a:p>
             <a:pPr rtl="1" algn="r" indent="0" marL="0">
@@ -3407,10 +3404,10 @@
           <a:ln/>
         </p:spPr>
         <p:txBody>
-          <a:bodyPr wrap="square" lIns="0" tIns="0" rIns="0" bIns="0" rtlCol="0" anchor="ctr"/>
+          <a:bodyPr wrap="square" lIns="0" tIns="0" rIns="0" bIns="0" rtlCol="1" anchor="ctr"/>
           <a:lstStyle/>
           <a:p>
-            <a:pPr algn="ctr" indent="0" marL="0">
+            <a:pPr rtl="1" algn="ctr" indent="0" marL="0">
               <a:buNone/>
             </a:pPr>
             <a:r>
@@ -3422,7 +3419,7 @@
                 <a:ea typeface="IBM Plex Sans Arabic" pitchFamily="34" charset="-122"/>
                 <a:cs typeface="IBM Plex Sans Arabic" pitchFamily="34" charset="-120"/>
               </a:rPr>
-              <a:t>−3.8%</a:t>
+              <a:t>‎−3.8%</a:t>
             </a:r>
             <a:endParaRPr lang="en-GB" sz="900" dirty="0"/>
           </a:p>
@@ -3473,7 +3470,7 @@
           <a:ln/>
         </p:spPr>
         <p:txBody>
-          <a:bodyPr wrap="square" lIns="0" tIns="0" rIns="0" bIns="0" rtlCol="0" anchor="t"/>
+          <a:bodyPr wrap="square" lIns="0" tIns="0" rIns="0" bIns="0" rtlCol="1" anchor="t"/>
           <a:lstStyle/>
           <a:p>
             <a:pPr rtl="1" algn="r" indent="0" marL="0">
@@ -3512,7 +3509,7 @@
           <a:ln/>
         </p:spPr>
         <p:txBody>
-          <a:bodyPr wrap="square" lIns="0" tIns="0" rIns="0" bIns="0" rtlCol="0" anchor="t"/>
+          <a:bodyPr wrap="square" lIns="0" tIns="0" rIns="0" bIns="0" rtlCol="1" anchor="t"/>
           <a:lstStyle/>
           <a:p>
             <a:pPr rtl="1" algn="r" indent="0" marL="0">
@@ -3551,7 +3548,7 @@
           <a:ln/>
         </p:spPr>
         <p:txBody>
-          <a:bodyPr wrap="square" lIns="0" tIns="0" rIns="0" bIns="0" rtlCol="0" anchor="t"/>
+          <a:bodyPr wrap="square" lIns="0" tIns="0" rIns="0" bIns="0" rtlCol="1" anchor="t"/>
           <a:lstStyle/>
           <a:p>
             <a:pPr rtl="1" algn="r" indent="0" marL="0">
@@ -3594,10 +3591,10 @@
           <a:ln/>
         </p:spPr>
         <p:txBody>
-          <a:bodyPr wrap="square" lIns="0" tIns="0" rIns="0" bIns="0" rtlCol="0" anchor="ctr"/>
+          <a:bodyPr wrap="square" lIns="0" tIns="0" rIns="0" bIns="0" rtlCol="1" anchor="ctr"/>
           <a:lstStyle/>
           <a:p>
-            <a:pPr algn="ctr" indent="0" marL="0">
+            <a:pPr rtl="1" algn="ctr" indent="0" marL="0">
               <a:buNone/>
             </a:pPr>
             <a:r>
@@ -3609,7 +3606,7 @@
                 <a:ea typeface="IBM Plex Sans Arabic" pitchFamily="34" charset="-122"/>
                 <a:cs typeface="IBM Plex Sans Arabic" pitchFamily="34" charset="-120"/>
               </a:rPr>
-              <a:t>−41.7%</a:t>
+              <a:t>‎−41.7%</a:t>
             </a:r>
             <a:endParaRPr lang="en-GB" sz="900" dirty="0"/>
           </a:p>
@@ -3660,7 +3657,7 @@
           <a:ln/>
         </p:spPr>
         <p:txBody>
-          <a:bodyPr wrap="square" lIns="0" tIns="0" rIns="0" bIns="0" rtlCol="0" anchor="t"/>
+          <a:bodyPr wrap="square" lIns="0" tIns="0" rIns="0" bIns="0" rtlCol="1" anchor="t"/>
           <a:lstStyle/>
           <a:p>
             <a:pPr rtl="1" algn="r" indent="0" marL="0">
@@ -3699,7 +3696,7 @@
           <a:ln/>
         </p:spPr>
         <p:txBody>
-          <a:bodyPr wrap="square" lIns="0" tIns="0" rIns="0" bIns="0" rtlCol="0" anchor="t"/>
+          <a:bodyPr wrap="square" lIns="0" tIns="0" rIns="0" bIns="0" rtlCol="1" anchor="t"/>
           <a:lstStyle/>
           <a:p>
             <a:pPr rtl="1" algn="r" indent="0" marL="0">
@@ -3738,7 +3735,7 @@
           <a:ln/>
         </p:spPr>
         <p:txBody>
-          <a:bodyPr wrap="square" lIns="0" tIns="0" rIns="0" bIns="0" rtlCol="0" anchor="t"/>
+          <a:bodyPr wrap="square" lIns="0" tIns="0" rIns="0" bIns="0" rtlCol="1" anchor="t"/>
           <a:lstStyle/>
           <a:p>
             <a:pPr rtl="1" algn="r" indent="0" marL="0">
@@ -3809,7 +3806,7 @@
           <a:ln/>
         </p:spPr>
         <p:txBody>
-          <a:bodyPr wrap="square" lIns="0" tIns="0" rIns="0" bIns="0" rtlCol="0" anchor="t"/>
+          <a:bodyPr wrap="square" lIns="0" tIns="0" rIns="0" bIns="0" rtlCol="1" anchor="t"/>
           <a:lstStyle/>
           <a:p>
             <a:pPr rtl="1" algn="r" indent="0" marL="0">
@@ -3868,7 +3865,7 @@
           <a:ln/>
         </p:spPr>
         <p:txBody>
-          <a:bodyPr wrap="square" lIns="0" tIns="0" rIns="0" bIns="0" rtlCol="0" anchor="t"/>
+          <a:bodyPr wrap="square" lIns="0" tIns="0" rIns="0" bIns="0" rtlCol="1" anchor="t"/>
           <a:lstStyle/>
           <a:p>
             <a:pPr rtl="1" algn="l" indent="0" marL="0">
@@ -3930,7 +3927,7 @@
           <a:ln/>
         </p:spPr>
         <p:txBody>
-          <a:bodyPr wrap="square" lIns="0" tIns="0" rIns="0" bIns="0" rtlCol="0" anchor="t"/>
+          <a:bodyPr wrap="square" lIns="0" tIns="0" rIns="0" bIns="0" rtlCol="1" anchor="t"/>
           <a:lstStyle/>
           <a:p>
             <a:pPr rtl="1" algn="r" indent="0" marL="0">
@@ -3969,7 +3966,7 @@
           <a:ln/>
         </p:spPr>
         <p:txBody>
-          <a:bodyPr wrap="square" lIns="0" tIns="0" rIns="0" bIns="0" rtlCol="0" anchor="t"/>
+          <a:bodyPr wrap="square" lIns="0" tIns="0" rIns="0" bIns="0" rtlCol="1" anchor="t"/>
           <a:lstStyle/>
           <a:p>
             <a:pPr rtl="1" algn="l" indent="0" marL="0">
@@ -8404,7 +8401,7 @@
           <a:ln/>
         </p:spPr>
         <p:txBody>
-          <a:bodyPr wrap="square" lIns="0" tIns="0" rIns="0" bIns="0" rtlCol="0" anchor="t"/>
+          <a:bodyPr wrap="square" lIns="0" tIns="0" rIns="0" bIns="0" rtlCol="1" anchor="t"/>
           <a:lstStyle/>
           <a:p>
             <a:pPr rtl="1" algn="r" indent="0" marL="0">
@@ -8463,7 +8460,7 @@
           <a:ln/>
         </p:spPr>
         <p:txBody>
-          <a:bodyPr wrap="square" lIns="0" tIns="0" rIns="0" bIns="0" rtlCol="0" anchor="t"/>
+          <a:bodyPr wrap="square" lIns="0" tIns="0" rIns="0" bIns="0" rtlCol="1" anchor="t"/>
           <a:lstStyle/>
           <a:p>
             <a:pPr rtl="1" algn="l" indent="0" marL="0">
@@ -8525,7 +8522,7 @@
           <a:ln/>
         </p:spPr>
         <p:txBody>
-          <a:bodyPr wrap="square" lIns="0" tIns="0" rIns="0" bIns="0" rtlCol="0" anchor="t"/>
+          <a:bodyPr wrap="square" lIns="0" tIns="0" rIns="0" bIns="0" rtlCol="1" anchor="t"/>
           <a:lstStyle/>
           <a:p>
             <a:pPr rtl="1" algn="r" indent="0" marL="0">
@@ -8564,7 +8561,7 @@
           <a:ln/>
         </p:spPr>
         <p:txBody>
-          <a:bodyPr wrap="square" lIns="0" tIns="0" rIns="0" bIns="0" rtlCol="0" anchor="t"/>
+          <a:bodyPr wrap="square" lIns="0" tIns="0" rIns="0" bIns="0" rtlCol="1" anchor="t"/>
           <a:lstStyle/>
           <a:p>
             <a:pPr rtl="1" algn="l" indent="0" marL="0">
@@ -10647,7 +10644,7 @@
           <a:ln/>
         </p:spPr>
         <p:txBody>
-          <a:bodyPr wrap="square" lIns="0" tIns="0" rIns="0" bIns="0" rtlCol="0" anchor="t"/>
+          <a:bodyPr wrap="square" lIns="0" tIns="0" rIns="0" bIns="0" rtlCol="1" anchor="t"/>
           <a:lstStyle/>
           <a:p>
             <a:pPr rtl="1" algn="r" indent="0" marL="0">
@@ -10706,7 +10703,7 @@
           <a:ln/>
         </p:spPr>
         <p:txBody>
-          <a:bodyPr wrap="square" lIns="0" tIns="0" rIns="0" bIns="0" rtlCol="0" anchor="t"/>
+          <a:bodyPr wrap="square" lIns="0" tIns="0" rIns="0" bIns="0" rtlCol="1" anchor="t"/>
           <a:lstStyle/>
           <a:p>
             <a:pPr rtl="1" algn="l" indent="0" marL="0">
@@ -10768,7 +10765,7 @@
           <a:ln/>
         </p:spPr>
         <p:txBody>
-          <a:bodyPr wrap="square" lIns="0" tIns="0" rIns="0" bIns="0" rtlCol="0" anchor="t"/>
+          <a:bodyPr wrap="square" lIns="0" tIns="0" rIns="0" bIns="0" rtlCol="1" anchor="t"/>
           <a:lstStyle/>
           <a:p>
             <a:pPr rtl="1" algn="r" indent="0" marL="0">
@@ -10807,7 +10804,7 @@
           <a:ln/>
         </p:spPr>
         <p:txBody>
-          <a:bodyPr wrap="square" lIns="0" tIns="0" rIns="0" bIns="0" rtlCol="0" anchor="t"/>
+          <a:bodyPr wrap="square" lIns="0" tIns="0" rIns="0" bIns="0" rtlCol="1" anchor="t"/>
           <a:lstStyle/>
           <a:p>
             <a:pPr rtl="1" algn="l" indent="0" marL="0">
@@ -11595,7 +11592,7 @@
           <a:ln/>
         </p:spPr>
         <p:txBody>
-          <a:bodyPr wrap="square" lIns="0" tIns="0" rIns="0" bIns="0" rtlCol="0" anchor="t"/>
+          <a:bodyPr wrap="square" lIns="0" tIns="0" rIns="0" bIns="0" rtlCol="1" anchor="t"/>
           <a:lstStyle/>
           <a:p>
             <a:pPr rtl="1" algn="r" indent="0" marL="0">
@@ -11654,7 +11651,7 @@
           <a:ln/>
         </p:spPr>
         <p:txBody>
-          <a:bodyPr wrap="square" lIns="0" tIns="0" rIns="0" bIns="0" rtlCol="0" anchor="t"/>
+          <a:bodyPr wrap="square" lIns="0" tIns="0" rIns="0" bIns="0" rtlCol="1" anchor="t"/>
           <a:lstStyle/>
           <a:p>
             <a:pPr rtl="1" algn="l" indent="0" marL="0">
@@ -11716,7 +11713,7 @@
           <a:ln/>
         </p:spPr>
         <p:txBody>
-          <a:bodyPr wrap="square" lIns="0" tIns="0" rIns="0" bIns="0" rtlCol="0" anchor="t"/>
+          <a:bodyPr wrap="square" lIns="0" tIns="0" rIns="0" bIns="0" rtlCol="1" anchor="t"/>
           <a:lstStyle/>
           <a:p>
             <a:pPr rtl="1" algn="r" indent="0" marL="0">
@@ -11755,7 +11752,7 @@
           <a:ln/>
         </p:spPr>
         <p:txBody>
-          <a:bodyPr wrap="square" lIns="0" tIns="0" rIns="0" bIns="0" rtlCol="0" anchor="t"/>
+          <a:bodyPr wrap="square" lIns="0" tIns="0" rIns="0" bIns="0" rtlCol="1" anchor="t"/>
           <a:lstStyle/>
           <a:p>
             <a:pPr rtl="1" algn="l" indent="0" marL="0">
@@ -12075,7 +12072,7 @@
           <a:ln/>
         </p:spPr>
         <p:txBody>
-          <a:bodyPr wrap="square" lIns="0" tIns="0" rIns="0" bIns="0" rtlCol="0" anchor="t"/>
+          <a:bodyPr wrap="square" lIns="0" tIns="0" rIns="0" bIns="0" rtlCol="1" anchor="t"/>
           <a:lstStyle/>
           <a:p>
             <a:pPr rtl="1" algn="r" indent="0" marL="0">
@@ -12134,7 +12131,7 @@
           <a:ln/>
         </p:spPr>
         <p:txBody>
-          <a:bodyPr wrap="square" lIns="0" tIns="0" rIns="0" bIns="0" rtlCol="0" anchor="t"/>
+          <a:bodyPr wrap="square" lIns="0" tIns="0" rIns="0" bIns="0" rtlCol="1" anchor="t"/>
           <a:lstStyle/>
           <a:p>
             <a:pPr rtl="1" algn="l" indent="0" marL="0">
@@ -12196,7 +12193,7 @@
           <a:ln/>
         </p:spPr>
         <p:txBody>
-          <a:bodyPr wrap="square" lIns="0" tIns="0" rIns="0" bIns="0" rtlCol="0" anchor="t"/>
+          <a:bodyPr wrap="square" lIns="0" tIns="0" rIns="0" bIns="0" rtlCol="1" anchor="t"/>
           <a:lstStyle/>
           <a:p>
             <a:pPr rtl="1" algn="r" indent="0" marL="0">
@@ -12235,7 +12232,7 @@
           <a:ln/>
         </p:spPr>
         <p:txBody>
-          <a:bodyPr wrap="square" lIns="0" tIns="0" rIns="0" bIns="0" rtlCol="0" anchor="t"/>
+          <a:bodyPr wrap="square" lIns="0" tIns="0" rIns="0" bIns="0" rtlCol="1" anchor="t"/>
           <a:lstStyle/>
           <a:p>
             <a:pPr rtl="1" algn="l" indent="0" marL="0">

--- a/v2/tests/unit/export/golden/report-ar.pptx
+++ b/v2/tests/unit/export/golden/report-ar.pptx
@@ -2017,7 +2017,7 @@
                 <a:ea typeface="Readex Pro" pitchFamily="34" charset="-122"/>
                 <a:cs typeface="Readex Pro" pitchFamily="34" charset="-120"/>
               </a:rPr>
-              <a:t>606,500</a:t>
+              <a:t>48,300</a:t>
             </a:r>
             <a:r>
               <a:rPr lang="ar-SA" altLang="en-US" sz="1000" dirty="0">
@@ -2067,7 +2067,7 @@
                 <a:ea typeface="IBM Plex Sans Arabic" pitchFamily="34" charset="-122"/>
                 <a:cs typeface="IBM Plex Sans Arabic" pitchFamily="34" charset="-120"/>
               </a:rPr>
-              <a:t>مقابل 512,000 ريال</a:t>
+              <a:t>مقابل 40,250 ريال</a:t>
             </a:r>
             <a:endParaRPr lang="ar-SA" sz="950" dirty="0"/>
           </a:p>
@@ -2110,7 +2110,7 @@
                 <a:ea typeface="IBM Plex Sans Arabic" pitchFamily="34" charset="-122"/>
                 <a:cs typeface="IBM Plex Sans Arabic" pitchFamily="34" charset="-120"/>
               </a:rPr>
-              <a:t>‎+18.5%</a:t>
+              <a:t>‎+20%</a:t>
             </a:r>
             <a:endParaRPr lang="en-GB" sz="900" dirty="0"/>
           </a:p>
@@ -2215,7 +2215,7 @@
                 <a:ea typeface="Readex Pro" pitchFamily="34" charset="-122"/>
                 <a:cs typeface="Readex Pro" pitchFamily="34" charset="-120"/>
               </a:rPr>
-              <a:t>4</a:t>
+              <a:t>3</a:t>
             </a:r>
             <a:endParaRPr lang="ar-SA" sz="2600" dirty="0"/>
           </a:p>
@@ -2254,7 +2254,7 @@
                 <a:ea typeface="IBM Plex Sans Arabic" pitchFamily="34" charset="-122"/>
                 <a:cs typeface="IBM Plex Sans Arabic" pitchFamily="34" charset="-120"/>
               </a:rPr>
-              <a:t>مقابل 2</a:t>
+              <a:t>مقابل 1</a:t>
             </a:r>
             <a:endParaRPr lang="ar-SA" sz="950" dirty="0"/>
           </a:p>
@@ -2297,7 +2297,7 @@
                 <a:ea typeface="IBM Plex Sans Arabic" pitchFamily="34" charset="-122"/>
                 <a:cs typeface="IBM Plex Sans Arabic" pitchFamily="34" charset="-120"/>
               </a:rPr>
-              <a:t>‎+100%</a:t>
+              <a:t>‎+200%</a:t>
             </a:r>
             <a:endParaRPr lang="en-GB" sz="900" dirty="0"/>
           </a:p>
@@ -2363,7 +2363,7 @@
                 <a:ea typeface="IBM Plex Sans Arabic" pitchFamily="34" charset="-122"/>
                 <a:cs typeface="IBM Plex Sans Arabic" pitchFamily="34" charset="-120"/>
               </a:rPr>
-              <a:t>العقود المحسّنة</a:t>
+              <a:t>زيارات الشركاء</a:t>
             </a:r>
             <a:endParaRPr lang="ar-SA" sz="1050" dirty="0"/>
           </a:p>
@@ -2402,7 +2402,7 @@
                 <a:ea typeface="Readex Pro" pitchFamily="34" charset="-122"/>
                 <a:cs typeface="Readex Pro" pitchFamily="34" charset="-120"/>
               </a:rPr>
-              <a:t>3</a:t>
+              <a:t>9</a:t>
             </a:r>
             <a:endParaRPr lang="ar-SA" sz="2600" dirty="0"/>
           </a:p>
@@ -2441,7 +2441,7 @@
                 <a:ea typeface="IBM Plex Sans Arabic" pitchFamily="34" charset="-122"/>
                 <a:cs typeface="IBM Plex Sans Arabic" pitchFamily="34" charset="-120"/>
               </a:rPr>
-              <a:t>مقابل 1</a:t>
+              <a:t>مقابل 6</a:t>
             </a:r>
             <a:endParaRPr lang="ar-SA" sz="950" dirty="0"/>
           </a:p>
@@ -2484,7 +2484,7 @@
                 <a:ea typeface="IBM Plex Sans Arabic" pitchFamily="34" charset="-122"/>
                 <a:cs typeface="IBM Plex Sans Arabic" pitchFamily="34" charset="-120"/>
               </a:rPr>
-              <a:t>‎+200%</a:t>
+              <a:t>‎+50%</a:t>
             </a:r>
             <a:endParaRPr lang="en-GB" sz="900" dirty="0"/>
           </a:p>
@@ -2550,7 +2550,7 @@
                 <a:ea typeface="IBM Plex Sans Arabic" pitchFamily="34" charset="-122"/>
                 <a:cs typeface="IBM Plex Sans Arabic" pitchFamily="34" charset="-120"/>
               </a:rPr>
-              <a:t>مزودو الفنادق والطيران</a:t>
+              <a:t>العروض المرسلة</a:t>
             </a:r>
             <a:endParaRPr lang="ar-SA" sz="1050" dirty="0"/>
           </a:p>
@@ -2589,7 +2589,7 @@
                 <a:ea typeface="Readex Pro" pitchFamily="34" charset="-122"/>
                 <a:cs typeface="Readex Pro" pitchFamily="34" charset="-120"/>
               </a:rPr>
-              <a:t>30</a:t>
+              <a:t>14</a:t>
             </a:r>
             <a:endParaRPr lang="ar-SA" sz="2600" dirty="0"/>
           </a:p>
@@ -2628,7 +2628,7 @@
                 <a:ea typeface="IBM Plex Sans Arabic" pitchFamily="34" charset="-122"/>
                 <a:cs typeface="IBM Plex Sans Arabic" pitchFamily="34" charset="-120"/>
               </a:rPr>
-              <a:t>مقابل 19</a:t>
+              <a:t>مقابل 11</a:t>
             </a:r>
             <a:endParaRPr lang="ar-SA" sz="950" dirty="0"/>
           </a:p>
@@ -2671,7 +2671,7 @@
                 <a:ea typeface="IBM Plex Sans Arabic" pitchFamily="34" charset="-122"/>
                 <a:cs typeface="IBM Plex Sans Arabic" pitchFamily="34" charset="-120"/>
               </a:rPr>
-              <a:t>‎+57.9%</a:t>
+              <a:t>‎+27.3%</a:t>
             </a:r>
             <a:endParaRPr lang="en-GB" sz="900" dirty="0"/>
           </a:p>
@@ -2737,7 +2737,7 @@
                 <a:ea typeface="IBM Plex Sans Arabic" pitchFamily="34" charset="-122"/>
                 <a:cs typeface="IBM Plex Sans Arabic" pitchFamily="34" charset="-120"/>
               </a:rPr>
-              <a:t>شركات الطيران</a:t>
+              <a:t>جهات اتصال الشركاء المضافة</a:t>
             </a:r>
             <a:endParaRPr lang="ar-SA" sz="1050" dirty="0"/>
           </a:p>
@@ -2776,7 +2776,7 @@
                 <a:ea typeface="Readex Pro" pitchFamily="34" charset="-122"/>
                 <a:cs typeface="Readex Pro" pitchFamily="34" charset="-120"/>
               </a:rPr>
-              <a:t>82</a:t>
+              <a:t>137</a:t>
             </a:r>
             <a:endParaRPr lang="ar-SA" sz="2600" dirty="0"/>
           </a:p>
@@ -2815,7 +2815,7 @@
                 <a:ea typeface="IBM Plex Sans Arabic" pitchFamily="34" charset="-122"/>
                 <a:cs typeface="IBM Plex Sans Arabic" pitchFamily="34" charset="-120"/>
               </a:rPr>
-              <a:t>مقابل 79</a:t>
+              <a:t>مقابل 120</a:t>
             </a:r>
             <a:endParaRPr lang="ar-SA" sz="950" dirty="0"/>
           </a:p>
@@ -2858,7 +2858,7 @@
                 <a:ea typeface="IBM Plex Sans Arabic" pitchFamily="34" charset="-122"/>
                 <a:cs typeface="IBM Plex Sans Arabic" pitchFamily="34" charset="-120"/>
               </a:rPr>
-              <a:t>‎+3.8%</a:t>
+              <a:t>‎+14.2%</a:t>
             </a:r>
             <a:endParaRPr lang="en-GB" sz="900" dirty="0"/>
           </a:p>
@@ -2924,7 +2924,7 @@
                 <a:ea typeface="IBM Plex Sans Arabic" pitchFamily="34" charset="-122"/>
                 <a:cs typeface="IBM Plex Sans Arabic" pitchFamily="34" charset="-120"/>
               </a:rPr>
-              <a:t>طرق الدفع</a:t>
+              <a:t>المدن المغطاة</a:t>
             </a:r>
             <a:endParaRPr lang="ar-SA" sz="1050" dirty="0"/>
           </a:p>
@@ -2963,7 +2963,7 @@
                 <a:ea typeface="Readex Pro" pitchFamily="34" charset="-122"/>
                 <a:cs typeface="Readex Pro" pitchFamily="34" charset="-120"/>
               </a:rPr>
-              <a:t>6</a:t>
+              <a:t>7</a:t>
             </a:r>
             <a:endParaRPr lang="ar-SA" sz="2600" dirty="0"/>
           </a:p>
@@ -3002,7 +3002,7 @@
                 <a:ea typeface="IBM Plex Sans Arabic" pitchFamily="34" charset="-122"/>
                 <a:cs typeface="IBM Plex Sans Arabic" pitchFamily="34" charset="-120"/>
               </a:rPr>
-              <a:t>مقابل 4</a:t>
+              <a:t>مقابل 5</a:t>
             </a:r>
             <a:endParaRPr lang="ar-SA" sz="950" dirty="0"/>
           </a:p>
@@ -3045,7 +3045,7 @@
                 <a:ea typeface="IBM Plex Sans Arabic" pitchFamily="34" charset="-122"/>
                 <a:cs typeface="IBM Plex Sans Arabic" pitchFamily="34" charset="-120"/>
               </a:rPr>
-              <a:t>‎+50%</a:t>
+              <a:t>‎+40%</a:t>
             </a:r>
             <a:endParaRPr lang="en-GB" sz="900" dirty="0"/>
           </a:p>
@@ -3111,7 +3111,7 @@
                 <a:ea typeface="IBM Plex Sans Arabic" pitchFamily="34" charset="-122"/>
                 <a:cs typeface="IBM Plex Sans Arabic" pitchFamily="34" charset="-120"/>
               </a:rPr>
-              <a:t>الدول المغطاة بخدمة سيارة مع سائق</a:t>
+              <a:t>ورش العمل المنفذة</a:t>
             </a:r>
             <a:endParaRPr lang="ar-SA" sz="1050" dirty="0"/>
           </a:p>
@@ -3150,7 +3150,7 @@
                 <a:ea typeface="Readex Pro" pitchFamily="34" charset="-122"/>
                 <a:cs typeface="Readex Pro" pitchFamily="34" charset="-120"/>
               </a:rPr>
-              <a:t>36</a:t>
+              <a:t>5</a:t>
             </a:r>
             <a:endParaRPr lang="ar-SA" sz="2600" dirty="0"/>
           </a:p>
@@ -3189,7 +3189,7 @@
                 <a:ea typeface="IBM Plex Sans Arabic" pitchFamily="34" charset="-122"/>
                 <a:cs typeface="IBM Plex Sans Arabic" pitchFamily="34" charset="-120"/>
               </a:rPr>
-              <a:t>مقابل 12</a:t>
+              <a:t>مقابل 4</a:t>
             </a:r>
             <a:endParaRPr lang="ar-SA" sz="950" dirty="0"/>
           </a:p>
@@ -3232,7 +3232,7 @@
                 <a:ea typeface="IBM Plex Sans Arabic" pitchFamily="34" charset="-122"/>
                 <a:cs typeface="IBM Plex Sans Arabic" pitchFamily="34" charset="-120"/>
               </a:rPr>
-              <a:t>‎+200%</a:t>
+              <a:t>‎+25%</a:t>
             </a:r>
             <a:endParaRPr lang="en-GB" sz="900" dirty="0"/>
           </a:p>
@@ -3298,7 +3298,7 @@
                 <a:ea typeface="IBM Plex Sans Arabic" pitchFamily="34" charset="-122"/>
                 <a:cs typeface="IBM Plex Sans Arabic" pitchFamily="34" charset="-120"/>
               </a:rPr>
-              <a:t>السداد في الموعد</a:t>
+              <a:t>الردود في الموعد</a:t>
             </a:r>
             <a:endParaRPr lang="ar-SA" sz="1050" dirty="0"/>
           </a:p>
@@ -3337,7 +3337,7 @@
                 <a:ea typeface="Readex Pro" pitchFamily="34" charset="-122"/>
                 <a:cs typeface="Readex Pro" pitchFamily="34" charset="-120"/>
               </a:rPr>
-              <a:t>87.5%</a:t>
+              <a:t>92.5%</a:t>
             </a:r>
             <a:endParaRPr lang="ar-SA" sz="2600" dirty="0"/>
           </a:p>
@@ -3376,7 +3376,7 @@
                 <a:ea typeface="IBM Plex Sans Arabic" pitchFamily="34" charset="-122"/>
                 <a:cs typeface="IBM Plex Sans Arabic" pitchFamily="34" charset="-120"/>
               </a:rPr>
-              <a:t>مقابل 91%</a:t>
+              <a:t>مقابل 90%</a:t>
             </a:r>
             <a:endParaRPr lang="ar-SA" sz="950" dirty="0"/>
           </a:p>
@@ -3399,7 +3399,7 @@
             </a:avLst>
           </a:prstGeom>
           <a:solidFill>
-            <a:srgbClr val="FBE4E8"/>
+            <a:srgbClr val="E2F2EA"/>
           </a:solidFill>
           <a:ln/>
         </p:spPr>
@@ -3411,17 +3411,17 @@
               <a:buNone/>
             </a:pPr>
             <a:r>
-              <a:rPr lang="en-GB" altLang="en-US" sz="900" b="1" dirty="0">
+              <a:rPr lang="ar-SA" altLang="en-US" sz="900" b="1" dirty="0">
                 <a:solidFill>
-                  <a:srgbClr val="C0233F"/>
+                  <a:srgbClr val="1F7A4D"/>
                 </a:solidFill>
                 <a:latin typeface="IBM Plex Sans Arabic" pitchFamily="34" charset="0"/>
                 <a:ea typeface="IBM Plex Sans Arabic" pitchFamily="34" charset="-122"/>
                 <a:cs typeface="IBM Plex Sans Arabic" pitchFamily="34" charset="-120"/>
               </a:rPr>
-              <a:t>‎−3.8%</a:t>
+              <a:t>‎+2.5 نقطة</a:t>
             </a:r>
-            <a:endParaRPr lang="en-GB" sz="900" dirty="0"/>
+            <a:endParaRPr lang="ar-SA" sz="900" dirty="0"/>
           </a:p>
         </p:txBody>
       </p:sp>
@@ -3524,7 +3524,7 @@
                 <a:ea typeface="Readex Pro" pitchFamily="34" charset="-122"/>
                 <a:cs typeface="Readex Pro" pitchFamily="34" charset="-120"/>
               </a:rPr>
-              <a:t>7</a:t>
+              <a:t>4</a:t>
             </a:r>
             <a:endParaRPr lang="ar-SA" sz="2600" dirty="0"/>
           </a:p>
@@ -3563,7 +3563,7 @@
                 <a:ea typeface="IBM Plex Sans Arabic" pitchFamily="34" charset="-122"/>
                 <a:cs typeface="IBM Plex Sans Arabic" pitchFamily="34" charset="-120"/>
               </a:rPr>
-              <a:t>مقابل 12</a:t>
+              <a:t>مقابل 6</a:t>
             </a:r>
             <a:endParaRPr lang="ar-SA" sz="950" dirty="0"/>
           </a:p>
@@ -3606,7 +3606,7 @@
                 <a:ea typeface="IBM Plex Sans Arabic" pitchFamily="34" charset="-122"/>
                 <a:cs typeface="IBM Plex Sans Arabic" pitchFamily="34" charset="-120"/>
               </a:rPr>
-              <a:t>‎−41.7%</a:t>
+              <a:t>‎−33.3%</a:t>
             </a:r>
             <a:endParaRPr lang="en-GB" sz="900" dirty="0"/>
           </a:p>
@@ -3711,7 +3711,7 @@
                 <a:ea typeface="Readex Pro" pitchFamily="34" charset="-122"/>
                 <a:cs typeface="Readex Pro" pitchFamily="34" charset="-120"/>
               </a:rPr>
-              <a:t>2</a:t>
+              <a:t>1</a:t>
             </a:r>
             <a:endParaRPr lang="ar-SA" sz="2600" dirty="0"/>
           </a:p>
@@ -4510,7 +4510,7 @@
                           <a:ea typeface="IBM Plex Mono" pitchFamily="34" charset="-122"/>
                           <a:cs typeface="IBM Plex Mono" pitchFamily="34" charset="-120"/>
                         </a:rPr>
-                        <a:t>11,500</a:t>
+                        <a:t>7,250</a:t>
                       </a:r>
                       <a:endParaRPr lang="ar-SA" sz="1050" dirty="0">
                         <a:latin typeface="IBM Plex Mono" charset="0"/>
@@ -4575,7 +4575,7 @@
                           <a:ea typeface="IBM Plex Mono" pitchFamily="34" charset="-122"/>
                           <a:cs typeface="IBM Plex Mono" pitchFamily="34" charset="-120"/>
                         </a:rPr>
-                        <a:t>11,500</a:t>
+                        <a:t>7,250</a:t>
                       </a:r>
                       <a:endParaRPr lang="ar-SA" sz="1050" dirty="0">
                         <a:latin typeface="IBM Plex Mono" charset="0"/>
@@ -4640,7 +4640,7 @@
                           <a:ea typeface="IBM Plex Mono" pitchFamily="34" charset="-122"/>
                           <a:cs typeface="IBM Plex Mono" pitchFamily="34" charset="-120"/>
                         </a:rPr>
-                        <a:t>100,000</a:t>
+                        <a:t>90,000</a:t>
                       </a:r>
                       <a:endParaRPr lang="ar-SA" sz="1050" dirty="0">
                         <a:latin typeface="IBM Plex Mono" charset="0"/>
@@ -4902,7 +4902,7 @@
                           <a:ea typeface="IBM Plex Mono" pitchFamily="34" charset="-122"/>
                           <a:cs typeface="IBM Plex Mono" pitchFamily="34" charset="-120"/>
                         </a:rPr>
-                        <a:t>1</a:t>
+                        <a:t>2</a:t>
                       </a:r>
                       <a:endParaRPr lang="ar-SA" sz="1050" dirty="0">
                         <a:latin typeface="IBM Plex Mono" charset="0"/>
@@ -5032,7 +5032,7 @@
                           <a:ea typeface="IBM Plex Mono" pitchFamily="34" charset="-122"/>
                           <a:cs typeface="IBM Plex Mono" pitchFamily="34" charset="-120"/>
                         </a:rPr>
-                        <a:t>3</a:t>
+                        <a:t>4</a:t>
                       </a:r>
                       <a:endParaRPr lang="ar-SA" sz="1050" dirty="0">
                         <a:latin typeface="IBM Plex Mono" charset="0"/>
@@ -5294,7 +5294,7 @@
                           <a:ea typeface="IBM Plex Mono" pitchFamily="34" charset="-122"/>
                           <a:cs typeface="IBM Plex Mono" pitchFamily="34" charset="-120"/>
                         </a:rPr>
-                        <a:t>2</a:t>
+                        <a:t>1</a:t>
                       </a:r>
                       <a:endParaRPr lang="ar-SA" sz="1050" dirty="0">
                         <a:latin typeface="IBM Plex Mono" charset="0"/>
@@ -5424,7 +5424,7 @@
                           <a:ea typeface="IBM Plex Mono" pitchFamily="34" charset="-122"/>
                           <a:cs typeface="IBM Plex Mono" pitchFamily="34" charset="-120"/>
                         </a:rPr>
-                        <a:t>2</a:t>
+                        <a:t>3</a:t>
                       </a:r>
                       <a:endParaRPr lang="ar-SA" sz="1050" dirty="0">
                         <a:latin typeface="IBM Plex Mono" charset="0"/>
@@ -5686,7 +5686,7 @@
                           <a:ea typeface="IBM Plex Mono" pitchFamily="34" charset="-122"/>
                           <a:cs typeface="IBM Plex Mono" pitchFamily="34" charset="-120"/>
                         </a:rPr>
-                        <a:t>250,000</a:t>
+                        <a:t>120,000</a:t>
                       </a:r>
                       <a:endParaRPr lang="ar-SA" sz="1050" dirty="0">
                         <a:latin typeface="IBM Plex Mono" charset="0"/>
@@ -5816,7 +5816,7 @@
                           <a:ea typeface="IBM Plex Mono" pitchFamily="34" charset="-122"/>
                           <a:cs typeface="IBM Plex Mono" pitchFamily="34" charset="-120"/>
                         </a:rPr>
-                        <a:t>500,000</a:t>
+                        <a:t>300,000</a:t>
                       </a:r>
                       <a:endParaRPr lang="ar-SA" sz="1050" dirty="0">
                         <a:latin typeface="IBM Plex Mono" charset="0"/>
@@ -6078,7 +6078,7 @@
                           <a:ea typeface="IBM Plex Mono" pitchFamily="34" charset="-122"/>
                           <a:cs typeface="IBM Plex Mono" pitchFamily="34" charset="-120"/>
                         </a:rPr>
-                        <a:t>5</a:t>
+                        <a:t>3</a:t>
                       </a:r>
                       <a:endParaRPr lang="ar-SA" sz="1050" dirty="0">
                         <a:latin typeface="IBM Plex Mono" charset="0"/>
@@ -6143,7 +6143,7 @@
                           <a:ea typeface="IBM Plex Mono" pitchFamily="34" charset="-122"/>
                           <a:cs typeface="IBM Plex Mono" pitchFamily="34" charset="-120"/>
                         </a:rPr>
-                        <a:t>2</a:t>
+                        <a:t>1</a:t>
                       </a:r>
                       <a:endParaRPr lang="ar-SA" sz="1050" dirty="0">
                         <a:latin typeface="IBM Plex Mono" charset="0"/>
@@ -6208,7 +6208,7 @@
                           <a:ea typeface="IBM Plex Mono" pitchFamily="34" charset="-122"/>
                           <a:cs typeface="IBM Plex Mono" pitchFamily="34" charset="-120"/>
                         </a:rPr>
-                        <a:t>6</a:t>
+                        <a:t>5</a:t>
                       </a:r>
                       <a:endParaRPr lang="ar-SA" sz="1050" dirty="0">
                         <a:latin typeface="IBM Plex Mono" charset="0"/>
@@ -6470,7 +6470,7 @@
                           <a:ea typeface="IBM Plex Mono" pitchFamily="34" charset="-122"/>
                           <a:cs typeface="IBM Plex Mono" pitchFamily="34" charset="-120"/>
                         </a:rPr>
-                        <a:t>4</a:t>
+                        <a:t>6</a:t>
                       </a:r>
                       <a:endParaRPr lang="ar-SA" sz="1050" dirty="0">
                         <a:latin typeface="IBM Plex Mono" charset="0"/>
@@ -6535,7 +6535,7 @@
                           <a:ea typeface="IBM Plex Mono" pitchFamily="34" charset="-122"/>
                           <a:cs typeface="IBM Plex Mono" pitchFamily="34" charset="-120"/>
                         </a:rPr>
-                        <a:t>1</a:t>
+                        <a:t>2</a:t>
                       </a:r>
                       <a:endParaRPr lang="ar-SA" sz="1050" dirty="0">
                         <a:latin typeface="IBM Plex Mono" charset="0"/>
@@ -6600,7 +6600,7 @@
                           <a:ea typeface="IBM Plex Mono" pitchFamily="34" charset="-122"/>
                           <a:cs typeface="IBM Plex Mono" pitchFamily="34" charset="-120"/>
                         </a:rPr>
-                        <a:t>4</a:t>
+                        <a:t>6</a:t>
                       </a:r>
                       <a:endParaRPr lang="ar-SA" sz="1050" dirty="0">
                         <a:latin typeface="IBM Plex Mono" charset="0"/>
@@ -7254,7 +7254,7 @@
                           <a:ea typeface="IBM Plex Mono" pitchFamily="34" charset="-122"/>
                           <a:cs typeface="IBM Plex Mono" pitchFamily="34" charset="-120"/>
                         </a:rPr>
-                        <a:t>1</a:t>
+                        <a:t>2</a:t>
                       </a:r>
                       <a:endParaRPr lang="ar-SA" sz="1050" dirty="0">
                         <a:latin typeface="IBM Plex Mono" charset="0"/>
@@ -7384,7 +7384,7 @@
                           <a:ea typeface="IBM Plex Mono" pitchFamily="34" charset="-122"/>
                           <a:cs typeface="IBM Plex Mono" pitchFamily="34" charset="-120"/>
                         </a:rPr>
-                        <a:t>1</a:t>
+                        <a:t>2</a:t>
                       </a:r>
                       <a:endParaRPr lang="ar-SA" sz="1050" dirty="0">
                         <a:latin typeface="IBM Plex Mono" charset="0"/>
@@ -7646,7 +7646,7 @@
                           <a:ea typeface="IBM Plex Mono" pitchFamily="34" charset="-122"/>
                           <a:cs typeface="IBM Plex Mono" pitchFamily="34" charset="-120"/>
                         </a:rPr>
-                        <a:t>42,000</a:t>
+                        <a:t>18,500</a:t>
                       </a:r>
                       <a:endParaRPr lang="ar-SA" sz="1050" dirty="0">
                         <a:latin typeface="IBM Plex Mono" charset="0"/>
@@ -7711,7 +7711,7 @@
                           <a:ea typeface="IBM Plex Mono" pitchFamily="34" charset="-122"/>
                           <a:cs typeface="IBM Plex Mono" pitchFamily="34" charset="-120"/>
                         </a:rPr>
-                        <a:t>42,000</a:t>
+                        <a:t>18,500</a:t>
                       </a:r>
                       <a:endParaRPr lang="ar-SA" sz="1050" dirty="0">
                         <a:latin typeface="IBM Plex Mono" charset="0"/>
@@ -7776,7 +7776,7 @@
                           <a:ea typeface="IBM Plex Mono" pitchFamily="34" charset="-122"/>
                           <a:cs typeface="IBM Plex Mono" pitchFamily="34" charset="-120"/>
                         </a:rPr>
-                        <a:t>50,000</a:t>
+                        <a:t>30,000</a:t>
                       </a:r>
                       <a:endParaRPr lang="ar-SA" sz="1050" dirty="0">
                         <a:latin typeface="IBM Plex Mono" charset="0"/>
@@ -8168,7 +8168,7 @@
                           <a:ea typeface="IBM Plex Mono" pitchFamily="34" charset="-122"/>
                           <a:cs typeface="IBM Plex Mono" pitchFamily="34" charset="-120"/>
                         </a:rPr>
-                        <a:t>90</a:t>
+                        <a:t>85</a:t>
                       </a:r>
                       <a:endParaRPr lang="ar-SA" sz="1050" dirty="0">
                         <a:latin typeface="IBM Plex Mono" charset="0"/>
@@ -9235,7 +9235,7 @@
                           <a:ea typeface="IBM Plex Mono" pitchFamily="34" charset="-122"/>
                           <a:cs typeface="IBM Plex Mono" pitchFamily="34" charset="-120"/>
                         </a:rPr>
-                        <a:t>3</a:t>
+                        <a:t>4</a:t>
                       </a:r>
                       <a:endParaRPr lang="ar-SA" sz="1050" dirty="0">
                         <a:latin typeface="IBM Plex Mono" charset="0"/>
@@ -9497,7 +9497,7 @@
                           <a:ea typeface="IBM Plex Mono" pitchFamily="34" charset="-122"/>
                           <a:cs typeface="IBM Plex Mono" pitchFamily="34" charset="-120"/>
                         </a:rPr>
-                        <a:t>1</a:t>
+                        <a:t>2</a:t>
                       </a:r>
                       <a:endParaRPr lang="ar-SA" sz="1050" dirty="0">
                         <a:latin typeface="IBM Plex Mono" charset="0"/>
@@ -9627,7 +9627,7 @@
                           <a:ea typeface="IBM Plex Mono" pitchFamily="34" charset="-122"/>
                           <a:cs typeface="IBM Plex Mono" pitchFamily="34" charset="-120"/>
                         </a:rPr>
-                        <a:t>2</a:t>
+                        <a:t>3</a:t>
                       </a:r>
                       <a:endParaRPr lang="ar-SA" sz="1050" dirty="0">
                         <a:latin typeface="IBM Plex Mono" charset="0"/>
@@ -9889,7 +9889,7 @@
                           <a:ea typeface="IBM Plex Mono" pitchFamily="34" charset="-122"/>
                           <a:cs typeface="IBM Plex Mono" pitchFamily="34" charset="-120"/>
                         </a:rPr>
-                        <a:t>34</a:t>
+                        <a:t>29</a:t>
                       </a:r>
                       <a:endParaRPr lang="ar-SA" sz="1050" dirty="0">
                         <a:latin typeface="IBM Plex Mono" charset="0"/>
@@ -9954,7 +9954,7 @@
                           <a:ea typeface="IBM Plex Mono" pitchFamily="34" charset="-122"/>
                           <a:cs typeface="IBM Plex Mono" pitchFamily="34" charset="-120"/>
                         </a:rPr>
-                        <a:t>32</a:t>
+                        <a:t>27</a:t>
                       </a:r>
                       <a:endParaRPr lang="ar-SA" sz="1050" dirty="0">
                         <a:latin typeface="IBM Plex Mono" charset="0"/>
@@ -10019,7 +10019,7 @@
                           <a:ea typeface="IBM Plex Mono" pitchFamily="34" charset="-122"/>
                           <a:cs typeface="IBM Plex Mono" pitchFamily="34" charset="-120"/>
                         </a:rPr>
-                        <a:t>30</a:t>
+                        <a:t>25</a:t>
                       </a:r>
                       <a:endParaRPr lang="ar-SA" sz="1050" dirty="0">
                         <a:latin typeface="IBM Plex Mono" charset="0"/>
@@ -10281,7 +10281,7 @@
                           <a:ea typeface="IBM Plex Mono" pitchFamily="34" charset="-122"/>
                           <a:cs typeface="IBM Plex Mono" pitchFamily="34" charset="-120"/>
                         </a:rPr>
-                        <a:t>3</a:t>
+                        <a:t>4</a:t>
                       </a:r>
                       <a:endParaRPr lang="ar-SA" sz="1050" dirty="0">
                         <a:latin typeface="IBM Plex Mono" charset="0"/>
@@ -10346,7 +10346,7 @@
                           <a:ea typeface="IBM Plex Mono" pitchFamily="34" charset="-122"/>
                           <a:cs typeface="IBM Plex Mono" pitchFamily="34" charset="-120"/>
                         </a:rPr>
-                        <a:t>1</a:t>
+                        <a:t>2</a:t>
                       </a:r>
                       <a:endParaRPr lang="ar-SA" sz="1050" dirty="0">
                         <a:latin typeface="IBM Plex Mono" charset="0"/>
@@ -10411,7 +10411,7 @@
                           <a:ea typeface="IBM Plex Mono" pitchFamily="34" charset="-122"/>
                           <a:cs typeface="IBM Plex Mono" pitchFamily="34" charset="-120"/>
                         </a:rPr>
-                        <a:t>5</a:t>
+                        <a:t>6</a:t>
                       </a:r>
                       <a:endParaRPr lang="ar-SA" sz="1050" dirty="0">
                         <a:latin typeface="IBM Plex Mono" charset="0"/>
@@ -10945,7 +10945,7 @@
                           <a:ea typeface="IBM Plex Sans Arabic" pitchFamily="34" charset="-122"/>
                           <a:cs typeface="IBM Plex Sans Arabic" pitchFamily="34" charset="-120"/>
                         </a:rPr>
-                        <a:t>•  توقيع اتفاقية تعاون مع Sample Travel LLC بخصم 5% على أسعار الباقات.</a:t>
+                        <a:t>•  توقيع اتفاقية تجريبية لثلاثة أشهر مع Sample Travel LLC بخصم 3% على أسعار باقات افتراضية.</a:t>
                       </a:r>
                       <a:endParaRPr lang="ar-SA" sz="1100" dirty="0">
                         <a:latin typeface="IBM Plex Sans Arabic" charset="0"/>
@@ -11018,7 +11018,7 @@
                           <a:ea typeface="IBM Plex Sans Arabic" pitchFamily="34" charset="-122"/>
                           <a:cs typeface="IBM Plex Sans Arabic" pitchFamily="34" charset="-120"/>
                         </a:rPr>
-                        <a:t>•  تجديد عقد Test Co A (DK-P-0001) ورفع الحد الائتماني إلى 50,000 ريال.</a:t>
+                        <a:t>•  تجديد العقد التجريبي مع Test Co A (DK-P-0001) وتحديد الحد الائتماني بـ 20,000 ريال.</a:t>
                       </a:r>
                       <a:endParaRPr lang="ar-SA" sz="1100" dirty="0">
                         <a:latin typeface="IBM Plex Sans Arabic" charset="0"/>
@@ -11091,7 +11091,7 @@
                           <a:ea typeface="IBM Plex Sans Arabic" pitchFamily="34" charset="-122"/>
                           <a:cs typeface="IBM Plex Sans Arabic" pitchFamily="34" charset="-120"/>
                         </a:rPr>
-                        <a:t>•  Madeup Airlines وافقت على سعر صافٍ ثابت للمجموعات من 10 أشخاص فأكثر (مراجعة في 14/08/2026).</a:t>
+                        <a:t>•  Madeup Airlines وافقت على سعر تجريبي ثابت للمجموعات من 8 أشخاص فأكثر (مراجعة في 12/07/2026).</a:t>
                       </a:r>
                       <a:endParaRPr lang="ar-SA" sz="1100" dirty="0">
                         <a:latin typeface="IBM Plex Sans Arabic" charset="0"/>
@@ -11180,7 +11180,7 @@
                           <a:ea typeface="IBM Plex Mono" pitchFamily="34" charset="-122"/>
                           <a:cs typeface="IBM Plex Mono" pitchFamily="34" charset="-120"/>
                         </a:rPr>
-                        <a:t>11,500 ريال</a:t>
+                        <a:t>7,250 ريال</a:t>
                       </a:r>
                       <a:endParaRPr lang="ar-SA" sz="1200" dirty="0"/>
                     </a:p>
@@ -11217,7 +11217,7 @@
                           <a:ea typeface="IBM Plex Sans Arabic" pitchFamily="34" charset="-122"/>
                           <a:cs typeface="IBM Plex Sans Arabic" pitchFamily="34" charset="-120"/>
                         </a:rPr>
-                        <a:t>•  سداد الفاتورة INV-T-0001 لعميل Test Co A بالكامل، وارتفعت الحجوزات من 1,200 إلى 3,450 خلال Q1–Q2 بنسبة 187.5%.</a:t>
+                        <a:t>•  سداد الفاتورة INV-T-0001 لعميل Test Co A بالكامل، وارتفعت الطلبات من 240 إلى 310 خلال Q1–Q2 بنسبة 29.2%.</a:t>
                       </a:r>
                       <a:endParaRPr lang="ar-SA" sz="1100" dirty="0">
                         <a:latin typeface="IBM Plex Sans Arabic" charset="0"/>
@@ -11260,7 +11260,7 @@
                           <a:ea typeface="IBM Plex Mono" pitchFamily="34" charset="-122"/>
                           <a:cs typeface="IBM Plex Mono" pitchFamily="34" charset="-120"/>
                         </a:rPr>
-                        <a:t>26,231 ريال</a:t>
+                        <a:t>3,140 ريال</a:t>
                       </a:r>
                       <a:endParaRPr lang="ar-SA" sz="1200" dirty="0"/>
                     </a:p>
@@ -11297,7 +11297,7 @@
                           <a:ea typeface="IBM Plex Sans Arabic" pitchFamily="34" charset="-122"/>
                           <a:cs typeface="IBM Plex Sans Arabic" pitchFamily="34" charset="-120"/>
                         </a:rPr>
-                        <a:t>•  استلام عمولة من Fake Institute عن عام 2025، مسجلة برقم DPIN-T-0001.</a:t>
+                        <a:t>•  تسجيل رسوم إحالة افتراضية من Sample Holding برقم DPIN-T-0001.</a:t>
                       </a:r>
                       <a:endParaRPr lang="ar-SA" sz="1100" dirty="0">
                         <a:latin typeface="IBM Plex Sans Arabic" charset="0"/>
@@ -11386,7 +11386,7 @@
                           <a:ea typeface="IBM Plex Mono" pitchFamily="34" charset="-122"/>
                           <a:cs typeface="IBM Plex Mono" pitchFamily="34" charset="-120"/>
                         </a:rPr>
-                        <a:t>42,000 ريال</a:t>
+                        <a:t>18,500 ريال</a:t>
                       </a:r>
                       <a:endParaRPr lang="ar-SA" sz="1200" dirty="0"/>
                     </a:p>
@@ -11440,7 +11440,7 @@
                           <a:ea typeface="IBM Plex Sans Arabic" pitchFamily="34" charset="-122"/>
                           <a:cs typeface="IBM Plex Sans Arabic" pitchFamily="34" charset="-120"/>
                         </a:rPr>
-                        <a:t>•  حل مشكلة تأخر إصدار التذاكر لحجوزات Madeup Airlines: التعرض 50,000 والخسارة الفعلية -8,000.</a:t>
+                        <a:t>•  معالجة التأكيدات المكررة في حجوزات Madeup Airlines التجريبية: التعرض 20,000 والخسارة الفعلية -1,500.</a:t>
                       </a:r>
                       <a:endParaRPr lang="ar-SA" sz="1100" dirty="0">
                         <a:latin typeface="IBM Plex Sans Arabic" charset="0"/>
@@ -11513,7 +11513,7 @@
                           <a:ea typeface="IBM Plex Sans Arabic" pitchFamily="34" charset="-122"/>
                           <a:cs typeface="IBM Plex Sans Arabic" pitchFamily="34" charset="-120"/>
                         </a:rPr>
-                        <a:t>•  الأرقام العربية المكتوبة تُطبع بأرقام لاتينية: 3 عقود ووفر 12.5%.</a:t>
+                        <a:t>•  الأرقام العربية المكتوبة تُطبع بأرقام لاتينية: 4 عقود ووفر 7.5%.</a:t>
                       </a:r>
                       <a:endParaRPr lang="ar-SA" sz="1100" dirty="0">
                         <a:latin typeface="IBM Plex Sans Arabic" charset="0"/>
@@ -11847,7 +11847,7 @@
                           <a:ea typeface="IBM Plex Sans Arabic" pitchFamily="34" charset="-122"/>
                           <a:cs typeface="IBM Plex Sans Arabic" pitchFamily="34" charset="-120"/>
                         </a:rPr>
-                        <a:t>•  لم يصل رد من Fake University بشأن التجديد، مفتوح منذ 3 أغسطس 2026 (57 يوماً).</a:t>
+                        <a:t>•  لم يصل رد من Test Co D بشأن التجربة، مفتوح منذ 10 أغسطس 2026 (50 يوماً).</a:t>
                       </a:r>
                       <a:endParaRPr lang="ar-SA" sz="1100" dirty="0">
                         <a:latin typeface="IBM Plex Sans Arabic" charset="0"/>
@@ -11920,7 +11920,7 @@
                           <a:ea typeface="IBM Plex Sans Arabic" pitchFamily="34" charset="-122"/>
                           <a:cs typeface="IBM Plex Sans Arabic" pitchFamily="34" charset="-120"/>
                         </a:rPr>
-                        <a:t>•  الدفع عبر بوابة Sample Pay ما زال بانتظار مراجعة المزود.</a:t>
+                        <a:t>•  مزامنة التقويم المشترك مع Sample Pay ما زالت بانتظار مراجعة المزود.</a:t>
                       </a:r>
                       <a:endParaRPr lang="ar-SA" sz="1100" dirty="0">
                         <a:latin typeface="IBM Plex Sans Arabic" charset="0"/>
@@ -11993,7 +11993,7 @@
                           <a:ea typeface="IBM Plex Sans Arabic" pitchFamily="34" charset="-122"/>
                           <a:cs typeface="IBM Plex Sans Arabic" pitchFamily="34" charset="-120"/>
                         </a:rPr>
-                        <a:t>•  تأخر رد السفارة على طلب التأشيرة لمجموعة الطلاب (المرجع T-0042).</a:t>
+                        <a:t>•  لم يؤكد العميل التجريبي موعد الاجتماع بعد (المرجع T-0042).</a:t>
                       </a:r>
                       <a:endParaRPr lang="ar-SA" sz="1100" dirty="0">
                         <a:latin typeface="IBM Plex Sans Arabic" charset="0"/>
@@ -12327,7 +12327,7 @@
                           <a:ea typeface="IBM Plex Sans Arabic" pitchFamily="34" charset="-122"/>
                           <a:cs typeface="IBM Plex Sans Arabic" pitchFamily="34" charset="-120"/>
                         </a:rPr>
-                        <a:t>•  استلام العمولة من Sample Travel LLC.</a:t>
+                        <a:t>•  متابعة نتائج التجربة مع Sample Travel LLC.</a:t>
                       </a:r>
                       <a:endParaRPr lang="ar-SA" sz="1100" dirty="0">
                         <a:latin typeface="IBM Plex Sans Arabic" charset="0"/>
@@ -12400,7 +12400,7 @@
                           <a:ea typeface="IBM Plex Sans Arabic" pitchFamily="34" charset="-122"/>
                           <a:cs typeface="IBM Plex Sans Arabic" pitchFamily="34" charset="-120"/>
                         </a:rPr>
-                        <a:t>•  الاجتماع مع أكبر 5 شركات طيران لتحديد مستهدفات 2027 وأكواد الخصم.</a:t>
+                        <a:t>•  تنفيذ زيارتين للشركاء وإرسال قائمة الأسعار الافتراضية للربع القادم.</a:t>
                       </a:r>
                       <a:endParaRPr lang="ar-SA" sz="1100" dirty="0">
                         <a:latin typeface="IBM Plex Sans Arabic" charset="0"/>
